--- a/public/templates/promotional-proposal-template.pptx
+++ b/public/templates/promotional-proposal-template.pptx
@@ -4158,7 +4158,7 @@
                 <a:ea typeface="Aptos" pitchFamily="34" charset="-122"/>
                 <a:cs typeface="Aptos" pitchFamily="34" charset="-120"/>
               </a:rPr>
-              <a:t>Editable chart placeholder</a:t>
+              <a:t>Editable chart area</a:t>
             </a:r>
             <a:endParaRPr lang="en-US" sz="1000" dirty="0"/>
           </a:p>
@@ -6327,7 +6327,7 @@
                 <a:ea typeface="Aptos" pitchFamily="34" charset="-122"/>
                 <a:cs typeface="Aptos" pitchFamily="34" charset="-120"/>
               </a:rPr>
-              <a:t>Editable chart placeholder</a:t>
+              <a:t>Editable chart area</a:t>
             </a:r>
             <a:endParaRPr lang="en-US" sz="1000" dirty="0"/>
           </a:p>
@@ -8496,7 +8496,7 @@
                 <a:ea typeface="Aptos" pitchFamily="34" charset="-122"/>
                 <a:cs typeface="Aptos" pitchFamily="34" charset="-120"/>
               </a:rPr>
-              <a:t>Editable chart placeholder</a:t>
+              <a:t>Editable chart area</a:t>
             </a:r>
             <a:endParaRPr lang="en-US" sz="1000" dirty="0"/>
           </a:p>
@@ -10665,7 +10665,7 @@
                 <a:ea typeface="Aptos" pitchFamily="34" charset="-122"/>
                 <a:cs typeface="Aptos" pitchFamily="34" charset="-120"/>
               </a:rPr>
-              <a:t>Editable chart placeholder</a:t>
+              <a:t>Editable chart area</a:t>
             </a:r>
             <a:endParaRPr lang="en-US" sz="1000" dirty="0"/>
           </a:p>
@@ -12834,7 +12834,7 @@
                 <a:ea typeface="Aptos" pitchFamily="34" charset="-122"/>
                 <a:cs typeface="Aptos" pitchFamily="34" charset="-120"/>
               </a:rPr>
-              <a:t>Editable chart placeholder</a:t>
+              <a:t>Editable chart area</a:t>
             </a:r>
             <a:endParaRPr lang="en-US" sz="1000" dirty="0"/>
           </a:p>
@@ -15003,7 +15003,7 @@
                 <a:ea typeface="Aptos" pitchFamily="34" charset="-122"/>
                 <a:cs typeface="Aptos" pitchFamily="34" charset="-120"/>
               </a:rPr>
-              <a:t>Editable chart placeholder</a:t>
+              <a:t>Editable chart area</a:t>
             </a:r>
             <a:endParaRPr lang="en-US" sz="1000" dirty="0"/>
           </a:p>
@@ -17172,7 +17172,7 @@
                 <a:ea typeface="Aptos" pitchFamily="34" charset="-122"/>
                 <a:cs typeface="Aptos" pitchFamily="34" charset="-120"/>
               </a:rPr>
-              <a:t>Editable chart placeholder</a:t>
+              <a:t>Editable chart area</a:t>
             </a:r>
             <a:endParaRPr lang="en-US" sz="1000" dirty="0"/>
           </a:p>
@@ -19341,7 +19341,7 @@
                 <a:ea typeface="Aptos" pitchFamily="34" charset="-122"/>
                 <a:cs typeface="Aptos" pitchFamily="34" charset="-120"/>
               </a:rPr>
-              <a:t>Editable chart placeholder</a:t>
+              <a:t>Editable chart area</a:t>
             </a:r>
             <a:endParaRPr lang="en-US" sz="1000" dirty="0"/>
           </a:p>

--- a/public/templates/promotional-proposal-template.pptx
+++ b/public/templates/promotional-proposal-template.pptx
@@ -1614,7 +1614,7 @@
       </p:sp>
       <p:pic>
         <p:nvPicPr>
-          <p:cNvPr id="3" name="Image 0" descr="/Users/phylsion/Desktop/nam-tools/public/images/branding/logo-full.png">    </p:cNvPr>
+          <p:cNvPr id="3" name="Image 0" descr="APT logo">    </p:cNvPr>
           <p:cNvPicPr>
             <a:picLocks noChangeAspect="1"/>
           </p:cNvPicPr>
@@ -1780,7 +1780,7 @@
       </p:sp>
       <p:pic>
         <p:nvPicPr>
-          <p:cNvPr id="8" name="Image 1" descr="/Users/phylsion/Desktop/nam-tools/public/images/branding/logo-full.png">    </p:cNvPr>
+          <p:cNvPr id="8" name="Image 1" descr="APT logo">    </p:cNvPr>
           <p:cNvPicPr>
             <a:picLocks noChangeAspect="1"/>
           </p:cNvPicPr>
@@ -1932,7 +1932,7 @@
                 <a:ea typeface="Aptos" pitchFamily="34" charset="-122"/>
                 <a:cs typeface="Aptos" pitchFamily="34" charset="-120"/>
               </a:rPr>
-              <a:t>Prepared with editable fictional data for NAM and commercial planning.</a:t>
+              <a:t>Prepared with editable fictional data for account and commercial planning.</a:t>
             </a:r>
             <a:endParaRPr lang="en-US" sz="1300" dirty="0"/>
           </a:p>
@@ -2415,7 +2415,7 @@
       </p:sp>
       <p:pic>
         <p:nvPicPr>
-          <p:cNvPr id="3" name="Image 0" descr="/Users/phylsion/Desktop/nam-tools/public/images/branding/logo-full.png">    </p:cNvPr>
+          <p:cNvPr id="3" name="Image 0" descr="APT logo">    </p:cNvPr>
           <p:cNvPicPr>
             <a:picLocks noChangeAspect="1"/>
           </p:cNvPicPr>
@@ -4584,7 +4584,7 @@
       </p:sp>
       <p:pic>
         <p:nvPicPr>
-          <p:cNvPr id="3" name="Image 0" descr="/Users/phylsion/Desktop/nam-tools/public/images/branding/logo-full.png">    </p:cNvPr>
+          <p:cNvPr id="3" name="Image 0" descr="APT logo">    </p:cNvPr>
           <p:cNvPicPr>
             <a:picLocks noChangeAspect="1"/>
           </p:cNvPicPr>
@@ -6753,7 +6753,7 @@
       </p:sp>
       <p:pic>
         <p:nvPicPr>
-          <p:cNvPr id="3" name="Image 0" descr="/Users/phylsion/Desktop/nam-tools/public/images/branding/logo-full.png">    </p:cNvPr>
+          <p:cNvPr id="3" name="Image 0" descr="APT logo">    </p:cNvPr>
           <p:cNvPicPr>
             <a:picLocks noChangeAspect="1"/>
           </p:cNvPicPr>
@@ -8922,7 +8922,7 @@
       </p:sp>
       <p:pic>
         <p:nvPicPr>
-          <p:cNvPr id="3" name="Image 0" descr="/Users/phylsion/Desktop/nam-tools/public/images/branding/logo-full.png">    </p:cNvPr>
+          <p:cNvPr id="3" name="Image 0" descr="APT logo">    </p:cNvPr>
           <p:cNvPicPr>
             <a:picLocks noChangeAspect="1"/>
           </p:cNvPicPr>
@@ -11091,7 +11091,7 @@
       </p:sp>
       <p:pic>
         <p:nvPicPr>
-          <p:cNvPr id="3" name="Image 0" descr="/Users/phylsion/Desktop/nam-tools/public/images/branding/logo-full.png">    </p:cNvPr>
+          <p:cNvPr id="3" name="Image 0" descr="APT logo">    </p:cNvPr>
           <p:cNvPicPr>
             <a:picLocks noChangeAspect="1"/>
           </p:cNvPicPr>
@@ -13260,7 +13260,7 @@
       </p:sp>
       <p:pic>
         <p:nvPicPr>
-          <p:cNvPr id="3" name="Image 0" descr="/Users/phylsion/Desktop/nam-tools/public/images/branding/logo-full.png">    </p:cNvPr>
+          <p:cNvPr id="3" name="Image 0" descr="APT logo">    </p:cNvPr>
           <p:cNvPicPr>
             <a:picLocks noChangeAspect="1"/>
           </p:cNvPicPr>
@@ -15429,7 +15429,7 @@
       </p:sp>
       <p:pic>
         <p:nvPicPr>
-          <p:cNvPr id="3" name="Image 0" descr="/Users/phylsion/Desktop/nam-tools/public/images/branding/logo-full.png">    </p:cNvPr>
+          <p:cNvPr id="3" name="Image 0" descr="APT logo">    </p:cNvPr>
           <p:cNvPicPr>
             <a:picLocks noChangeAspect="1"/>
           </p:cNvPicPr>
@@ -17598,7 +17598,7 @@
       </p:sp>
       <p:pic>
         <p:nvPicPr>
-          <p:cNvPr id="3" name="Image 0" descr="/Users/phylsion/Desktop/nam-tools/public/images/branding/logo-full.png">    </p:cNvPr>
+          <p:cNvPr id="3" name="Image 0" descr="APT logo">    </p:cNvPr>
           <p:cNvPicPr>
             <a:picLocks noChangeAspect="1"/>
           </p:cNvPicPr>
